--- a/docs/MazeRunner_Slides.pptx
+++ b/docs/MazeRunner_Slides.pptx
@@ -786,7 +786,7 @@
           <a:lstStyle/>
           <a:p>
             <a:r>
-              <a:t>AKHIL — 40 seconds. Pick ONE item, don't read all four. Best is the predictive enemy, because it names a real limitation: the enemy always trails, it never intercepts. 'With more time we'd have it path to where you're heading, so it could cut you off at a junction. That's a different problem - you have to predict intent, not just compute a route.' Then close cleanly and STOP: 'That's our project. Code and documentation are on GitHub. Happy to take questions.'</a:t>
+              <a:t>AKHIL - 60 seconds. This is YOUR feature, so take it properly. The other enemies path to where the player IS, so they always trail. This one predicts where you're going and gets there first. Stage one: it walks forward along your heading and STOPS at junctions - that honesty is the interesting bit, it refuses to guess where it cannot know. Stage two: one flood fill, then the deepest cell on that route it can reach before you - the yellow box. Then the trade-off: ~721 cells of thinking per step against BFS's 328, so it pays for the ability. If asked how often it works: 23-32% within 20 cells, never beyond about 30, because the lookahead bounds how far ahead it can commit. Close: 'That's our project. Code and documentation are on GitHub. Happy to take questions.'</a:t>
             </a:r>
           </a:p>
         </p:txBody>
@@ -6457,7 +6457,7 @@
     <p:bg>
       <p:bgPr>
         <a:solidFill>
-          <a:srgbClr val="56CCF2"/>
+          <a:srgbClr val="121218"/>
         </a:solidFill>
         <a:effectLst/>
       </p:bgPr>
@@ -6477,8 +6477,8 @@
         </p:nvSpPr>
         <p:spPr>
           <a:xfrm>
-            <a:off x="777240" y="685800"/>
-            <a:ext cx="10637215" cy="1371600"/>
+            <a:off x="777240" y="566928"/>
+            <a:ext cx="10637215" cy="1280160"/>
           </a:xfrm>
           <a:prstGeom prst="rect">
             <a:avLst/>
@@ -6497,13 +6497,13 @@
               </a:spcAft>
               <a:defRPr sz="1300" b="0">
                 <a:solidFill>
-                  <a:srgbClr val="15506B"/>
+                  <a:srgbClr val="9B59B6"/>
                 </a:solidFill>
                 <a:latin typeface="Consolas"/>
               </a:defRPr>
             </a:pPr>
             <a:r>
-              <a:t>FUTURE SCOPE</a:t>
+              <a:t>BEYOND THE BRIEF</a:t>
             </a:r>
           </a:p>
           <a:p>
@@ -6511,65 +6511,43 @@
               <a:spcAft>
                 <a:spcPts val="0"/>
               </a:spcAft>
-              <a:defRPr sz="4000" b="1">
-                <a:solidFill>
-                  <a:srgbClr val="121218"/>
+              <a:defRPr sz="3800" b="1">
+                <a:solidFill>
+                  <a:srgbClr val="F2F2F7"/>
                 </a:solidFill>
                 <a:latin typeface="Segoe UI"/>
               </a:defRPr>
             </a:pPr>
             <a:r>
-              <a:t>What we would build next</a:t>
-            </a:r>
-          </a:p>
-        </p:txBody>
-      </p:sp>
-      <p:sp>
-        <p:nvSpPr>
-          <p:cNvPr id="3" name="Rounded Rectangle 2"/>
-          <p:cNvSpPr/>
+              <a:t>An enemy that cuts you off</a:t>
+            </a:r>
+          </a:p>
+        </p:txBody>
+      </p:sp>
+      <p:pic>
+        <p:nvPicPr>
+          <p:cNvPr id="3" name="Picture 2" descr="demo_intercept.png"/>
+          <p:cNvPicPr>
+            <a:picLocks noChangeAspect="1"/>
+          </p:cNvPicPr>
           <p:nvPr/>
-        </p:nvSpPr>
-        <p:spPr>
-          <a:xfrm>
-            <a:off x="777240" y="2514600"/>
-            <a:ext cx="2508427" cy="2286000"/>
-          </a:xfrm>
-          <a:prstGeom prst="roundRect">
-            <a:avLst>
-              <a:gd name="adj" fmla="val 6000"/>
-            </a:avLst>
+        </p:nvPicPr>
+        <p:blipFill>
+          <a:blip r:embed="rId2"/>
+          <a:stretch>
+            <a:fillRect/>
+          </a:stretch>
+        </p:blipFill>
+        <p:spPr>
+          <a:xfrm>
+            <a:off x="777240" y="2057400"/>
+            <a:ext cx="6035040" cy="4291332"/>
+          </a:xfrm>
+          <a:prstGeom prst="rect">
+            <a:avLst/>
           </a:prstGeom>
-          <a:solidFill>
-            <a:srgbClr val="EAF8FE"/>
-          </a:solidFill>
-          <a:ln w="12700">
-            <a:solidFill>
-              <a:srgbClr val="8FD9F5"/>
-            </a:solidFill>
-          </a:ln>
-          <a:effectLst/>
-        </p:spPr>
-        <p:style>
-          <a:lnRef idx="1">
-            <a:schemeClr val="accent1"/>
-          </a:lnRef>
-          <a:fillRef idx="3">
-            <a:schemeClr val="accent1"/>
-          </a:fillRef>
-          <a:effectRef idx="2">
-            <a:schemeClr val="accent1"/>
-          </a:effectRef>
-          <a:fontRef idx="minor">
-            <a:schemeClr val="lt1"/>
-          </a:fontRef>
-        </p:style>
-        <p:txBody>
-          <a:bodyPr rtlCol="0" anchor="ctr"/>
-          <a:lstStyle/>
-          <a:p/>
-        </p:txBody>
-      </p:sp>
+        </p:spPr>
+      </p:pic>
       <p:sp>
         <p:nvSpPr>
           <p:cNvPr id="4" name="TextBox 3"/>
@@ -6578,8 +6556,8 @@
         </p:nvSpPr>
         <p:spPr>
           <a:xfrm>
-            <a:off x="1033272" y="2743200"/>
-            <a:ext cx="1996363" cy="1920240"/>
+            <a:off x="7132320" y="2057400"/>
+            <a:ext cx="4282135" cy="822960"/>
           </a:xfrm>
           <a:prstGeom prst="rect">
             <a:avLst/>
@@ -6591,22 +6569,6 @@
             <a:spAutoFit/>
           </a:bodyPr>
           <a:lstStyle/>
-          <a:p>
-            <a:pPr>
-              <a:spcAft>
-                <a:spcPts val="700"/>
-              </a:spcAft>
-              <a:defRPr sz="1500" b="1">
-                <a:solidFill>
-                  <a:srgbClr val="121218"/>
-                </a:solidFill>
-                <a:latin typeface="Segoe UI"/>
-              </a:defRPr>
-            </a:pPr>
-            <a:r>
-              <a:t>A predictive enemy</a:t>
-            </a:r>
-          </a:p>
           <a:p>
             <a:pPr>
               <a:lnSpc>
@@ -6615,15 +6577,15 @@
               <a:spcAft>
                 <a:spcPts val="0"/>
               </a:spcAft>
-              <a:defRPr sz="1200" b="0">
-                <a:solidFill>
-                  <a:srgbClr val="2C3A44"/>
+              <a:defRPr sz="1400" b="0">
+                <a:solidFill>
+                  <a:srgbClr val="C9CEDA"/>
                 </a:solidFill>
                 <a:latin typeface="Segoe UI"/>
               </a:defRPr>
             </a:pPr>
             <a:r>
-              <a:t>Right now it chases where you are. An enemy that paths to where you are heading could cut you off at a junction instead of trailing you.</a:t>
+              <a:t>The other enemies path to where you ARE, so they always trail. This one asks where you will BE.</a:t>
             </a:r>
           </a:p>
         </p:txBody>
@@ -6636,8 +6598,8 @@
         </p:nvSpPr>
         <p:spPr>
           <a:xfrm>
-            <a:off x="3486835" y="2514600"/>
-            <a:ext cx="2508427" cy="2286000"/>
+            <a:off x="7132320" y="3063240"/>
+            <a:ext cx="4282135" cy="1298448"/>
           </a:xfrm>
           <a:prstGeom prst="roundRect">
             <a:avLst>
@@ -6645,11 +6607,11 @@
             </a:avLst>
           </a:prstGeom>
           <a:solidFill>
-            <a:srgbClr val="EAF8FE"/>
+            <a:srgbClr val="1B1B24"/>
           </a:solidFill>
           <a:ln w="12700">
             <a:solidFill>
-              <a:srgbClr val="8FD9F5"/>
+              <a:srgbClr val="2E2E3C"/>
             </a:solidFill>
           </a:ln>
           <a:effectLst/>
@@ -6676,14 +6638,58 @@
       </p:sp>
       <p:sp>
         <p:nvSpPr>
-          <p:cNvPr id="6" name="TextBox 5"/>
+          <p:cNvPr id="6" name="Rectangle 5"/>
+          <p:cNvSpPr/>
+          <p:nvPr/>
+        </p:nvSpPr>
+        <p:spPr>
+          <a:xfrm>
+            <a:off x="7132320" y="3063240"/>
+            <a:ext cx="50292" cy="1298448"/>
+          </a:xfrm>
+          <a:prstGeom prst="rect">
+            <a:avLst/>
+          </a:prstGeom>
+          <a:solidFill>
+            <a:srgbClr val="9B59B6"/>
+          </a:solidFill>
+          <a:ln>
+            <a:noFill/>
+          </a:ln>
+          <a:effectLst/>
+        </p:spPr>
+        <p:style>
+          <a:lnRef idx="1">
+            <a:schemeClr val="accent1"/>
+          </a:lnRef>
+          <a:fillRef idx="3">
+            <a:schemeClr val="accent1"/>
+          </a:fillRef>
+          <a:effectRef idx="2">
+            <a:schemeClr val="accent1"/>
+          </a:effectRef>
+          <a:fontRef idx="minor">
+            <a:schemeClr val="lt1"/>
+          </a:fontRef>
+        </p:style>
+        <p:txBody>
+          <a:bodyPr rtlCol="0" anchor="ctr"/>
+          <a:lstStyle/>
+          <a:p>
+            <a:pPr algn="ctr"/>
+          </a:p>
+        </p:txBody>
+      </p:sp>
+      <p:sp>
+        <p:nvSpPr>
+          <p:cNvPr id="7" name="TextBox 6"/>
           <p:cNvSpPr txBox="1"/>
           <p:nvPr/>
         </p:nvSpPr>
         <p:spPr>
           <a:xfrm>
-            <a:off x="3742867" y="2743200"/>
-            <a:ext cx="1996363" cy="1920240"/>
+            <a:off x="7388352" y="3227832"/>
+            <a:ext cx="3770071" cy="1005840"/>
           </a:xfrm>
           <a:prstGeom prst="rect">
             <a:avLst/>
@@ -6698,50 +6704,50 @@
           <a:p>
             <a:pPr>
               <a:spcAft>
-                <a:spcPts val="700"/>
+                <a:spcPts val="500"/>
               </a:spcAft>
-              <a:defRPr sz="1500" b="1">
-                <a:solidFill>
-                  <a:srgbClr val="121218"/>
+              <a:defRPr sz="1450" b="1">
+                <a:solidFill>
+                  <a:srgbClr val="9B59B6"/>
                 </a:solidFill>
                 <a:latin typeface="Segoe UI"/>
               </a:defRPr>
             </a:pPr>
             <a:r>
-              <a:t>Dijkstra with terrain</a:t>
+              <a:t>1 — Predict the route</a:t>
             </a:r>
           </a:p>
           <a:p>
             <a:pPr>
               <a:lnSpc>
-                <a:spcPct val="130000"/>
+                <a:spcPct val="125000"/>
               </a:lnSpc>
               <a:spcAft>
                 <a:spcPts val="0"/>
               </a:spcAft>
-              <a:defRPr sz="1200" b="0">
-                <a:solidFill>
-                  <a:srgbClr val="2C3A44"/>
+              <a:defRPr sz="1150" b="0">
+                <a:solidFill>
+                  <a:srgbClr val="C9CEDA"/>
                 </a:solidFill>
                 <a:latin typeface="Segoe UI"/>
               </a:defRPr>
             </a:pPr>
             <a:r>
-              <a:t>Mud cells costing 3 steps instead of 1, to show why BFS is really Dijkstra with every edge weighted the same.</a:t>
-            </a:r>
-          </a:p>
-        </p:txBody>
-      </p:sp>
-      <p:sp>
-        <p:nvSpPr>
-          <p:cNvPr id="7" name="Rounded Rectangle 6"/>
+              <a:t>Walk forward along your heading, following forced corridor bends. At a junction it STOPS — it cannot know which way you will turn, and guessing is worse than not guessing.</a:t>
+            </a:r>
+          </a:p>
+        </p:txBody>
+      </p:sp>
+      <p:sp>
+        <p:nvSpPr>
+          <p:cNvPr id="8" name="Rounded Rectangle 7"/>
           <p:cNvSpPr/>
           <p:nvPr/>
         </p:nvSpPr>
         <p:spPr>
           <a:xfrm>
-            <a:off x="6196431" y="2514600"/>
-            <a:ext cx="2508427" cy="2286000"/>
+            <a:off x="7132320" y="4526280"/>
+            <a:ext cx="4282135" cy="1298448"/>
           </a:xfrm>
           <a:prstGeom prst="roundRect">
             <a:avLst>
@@ -6749,11 +6755,11 @@
             </a:avLst>
           </a:prstGeom>
           <a:solidFill>
-            <a:srgbClr val="EAF8FE"/>
+            <a:srgbClr val="1B1B24"/>
           </a:solidFill>
           <a:ln w="12700">
             <a:solidFill>
-              <a:srgbClr val="8FD9F5"/>
+              <a:srgbClr val="2E2E3C"/>
             </a:solidFill>
           </a:ln>
           <a:effectLst/>
@@ -6780,85 +6786,23 @@
       </p:sp>
       <p:sp>
         <p:nvSpPr>
-          <p:cNvPr id="8" name="TextBox 7"/>
-          <p:cNvSpPr txBox="1"/>
+          <p:cNvPr id="9" name="Rectangle 8"/>
+          <p:cNvSpPr/>
           <p:nvPr/>
         </p:nvSpPr>
         <p:spPr>
           <a:xfrm>
-            <a:off x="6452463" y="2743200"/>
-            <a:ext cx="1996363" cy="1920240"/>
+            <a:off x="7132320" y="4526280"/>
+            <a:ext cx="50292" cy="1298448"/>
           </a:xfrm>
           <a:prstGeom prst="rect">
             <a:avLst/>
           </a:prstGeom>
-          <a:noFill/>
-        </p:spPr>
-        <p:txBody>
-          <a:bodyPr wrap="square" lIns="0" rIns="0" tIns="0" bIns="0">
-            <a:spAutoFit/>
-          </a:bodyPr>
-          <a:lstStyle/>
-          <a:p>
-            <a:pPr>
-              <a:spcAft>
-                <a:spcPts val="700"/>
-              </a:spcAft>
-              <a:defRPr sz="1500" b="1">
-                <a:solidFill>
-                  <a:srgbClr val="121218"/>
-                </a:solidFill>
-                <a:latin typeface="Segoe UI"/>
-              </a:defRPr>
-            </a:pPr>
-            <a:r>
-              <a:t>A better heuristic</a:t>
-            </a:r>
-          </a:p>
-          <a:p>
-            <a:pPr>
-              <a:lnSpc>
-                <a:spcPct val="130000"/>
-              </a:lnSpc>
-              <a:spcAft>
-                <a:spcPts val="0"/>
-              </a:spcAft>
-              <a:defRPr sz="1200" b="0">
-                <a:solidFill>
-                  <a:srgbClr val="2C3A44"/>
-                </a:solidFill>
-                <a:latin typeface="Segoe UI"/>
-              </a:defRPr>
-            </a:pPr>
-            <a:r>
-              <a:t>Manhattan distance is weak in a twisty maze. One that accounts for walls would widen A*'s lead — if it can be computed cheaply enough to pay for itself.</a:t>
-            </a:r>
-          </a:p>
-        </p:txBody>
-      </p:sp>
-      <p:sp>
-        <p:nvSpPr>
-          <p:cNvPr id="9" name="Rounded Rectangle 8"/>
-          <p:cNvSpPr/>
-          <p:nvPr/>
-        </p:nvSpPr>
-        <p:spPr>
-          <a:xfrm>
-            <a:off x="8906027" y="2514600"/>
-            <a:ext cx="2508427" cy="2286000"/>
-          </a:xfrm>
-          <a:prstGeom prst="roundRect">
-            <a:avLst>
-              <a:gd name="adj" fmla="val 6000"/>
-            </a:avLst>
-          </a:prstGeom>
           <a:solidFill>
-            <a:srgbClr val="EAF8FE"/>
+            <a:srgbClr val="FFD666"/>
           </a:solidFill>
-          <a:ln w="12700">
-            <a:solidFill>
-              <a:srgbClr val="8FD9F5"/>
-            </a:solidFill>
+          <a:ln>
+            <a:noFill/>
           </a:ln>
           <a:effectLst/>
         </p:spPr>
@@ -6879,7 +6823,9 @@
         <p:txBody>
           <a:bodyPr rtlCol="0" anchor="ctr"/>
           <a:lstStyle/>
-          <a:p/>
+          <a:p>
+            <a:pPr algn="ctr"/>
+          </a:p>
         </p:txBody>
       </p:sp>
       <p:sp>
@@ -6890,8 +6836,8 @@
         </p:nvSpPr>
         <p:spPr>
           <a:xfrm>
-            <a:off x="9162059" y="2743200"/>
-            <a:ext cx="1996363" cy="1920240"/>
+            <a:off x="7388352" y="4690872"/>
+            <a:ext cx="3770071" cy="1005840"/>
           </a:xfrm>
           <a:prstGeom prst="rect">
             <a:avLst/>
@@ -6906,36 +6852,36 @@
           <a:p>
             <a:pPr>
               <a:spcAft>
-                <a:spcPts val="700"/>
+                <a:spcPts val="500"/>
               </a:spcAft>
-              <a:defRPr sz="1500" b="1">
-                <a:solidFill>
-                  <a:srgbClr val="121218"/>
+              <a:defRPr sz="1450" b="1">
+                <a:solidFill>
+                  <a:srgbClr val="FFD666"/>
                 </a:solidFill>
                 <a:latin typeface="Segoe UI"/>
               </a:defRPr>
             </a:pPr>
             <a:r>
-              <a:t>Fog of war</a:t>
+              <a:t>2 — Find the cut-off</a:t>
             </a:r>
           </a:p>
           <a:p>
             <a:pPr>
               <a:lnSpc>
-                <a:spcPct val="130000"/>
+                <a:spcPct val="125000"/>
               </a:lnSpc>
               <a:spcAft>
                 <a:spcPts val="0"/>
               </a:spcAft>
-              <a:defRPr sz="1200" b="0">
-                <a:solidFill>
-                  <a:srgbClr val="2C3A44"/>
+              <a:defRPr sz="1150" b="0">
+                <a:solidFill>
+                  <a:srgbClr val="C9CEDA"/>
                 </a:solidFill>
                 <a:latin typeface="Segoe UI"/>
               </a:defRPr>
             </a:pPr>
             <a:r>
-              <a:t>Limit the player's vision radius, so the maze has to be learned rather than read off the screen in one glance.</a:t>
+              <a:t>One flood fill gives its distance to every cell. It takes the deepest cell on your route it can reach no later than you — the yellow box.</a:t>
             </a:r>
           </a:p>
         </p:txBody>
@@ -6948,8 +6894,8 @@
         </p:nvSpPr>
         <p:spPr>
           <a:xfrm>
-            <a:off x="777240" y="5349240"/>
-            <a:ext cx="10637215" cy="548640"/>
+            <a:off x="7132320" y="5943600"/>
+            <a:ext cx="4282135" cy="457200"/>
           </a:xfrm>
           <a:prstGeom prst="rect">
             <a:avLst/>
@@ -6963,34 +6909,60 @@
           <a:lstStyle/>
           <a:p>
             <a:pPr>
+              <a:lnSpc>
+                <a:spcPct val="125000"/>
+              </a:lnSpc>
               <a:spcAft>
-                <a:spcPts val="600"/>
+                <a:spcPts val="0"/>
               </a:spcAft>
-              <a:defRPr sz="1600" b="1">
-                <a:solidFill>
-                  <a:srgbClr val="121218"/>
-                </a:solidFill>
-                <a:latin typeface="Consolas"/>
+              <a:defRPr sz="1100" b="0">
+                <a:solidFill>
+                  <a:srgbClr val="6A7179"/>
+                </a:solidFill>
+                <a:latin typeface="Segoe UI"/>
               </a:defRPr>
             </a:pPr>
             <a:r>
-              <a:t>github.com/Hyperval/maze-runner</a:t>
-            </a:r>
-          </a:p>
+              <a:t>Costs ~721 cells of thinking per step against BFS's 328. It pays for the ability.</a:t>
+            </a:r>
+          </a:p>
+        </p:txBody>
+      </p:sp>
+      <p:sp>
+        <p:nvSpPr>
+          <p:cNvPr id="12" name="TextBox 11"/>
+          <p:cNvSpPr txBox="1"/>
+          <p:nvPr/>
+        </p:nvSpPr>
+        <p:spPr>
+          <a:xfrm>
+            <a:off x="777240" y="6199632"/>
+            <a:ext cx="10637215" cy="411480"/>
+          </a:xfrm>
+          <a:prstGeom prst="rect">
+            <a:avLst/>
+          </a:prstGeom>
+          <a:noFill/>
+        </p:spPr>
+        <p:txBody>
+          <a:bodyPr wrap="square" lIns="0" rIns="0" tIns="0" bIns="0">
+            <a:spAutoFit/>
+          </a:bodyPr>
+          <a:lstStyle/>
           <a:p>
             <a:pPr>
               <a:spcAft>
                 <a:spcPts val="0"/>
               </a:spcAft>
-              <a:defRPr sz="1600" b="0">
-                <a:solidFill>
-                  <a:srgbClr val="15506B"/>
+              <a:defRPr sz="1050" b="0">
+                <a:solidFill>
+                  <a:srgbClr val="6A7179"/>
                 </a:solidFill>
                 <a:latin typeface="Segoe UI"/>
               </a:defRPr>
             </a:pPr>
             <a:r>
-              <a:t>Thank you — questions welcome.</a:t>
+              <a:t>Still ahead: enemies that cooperate to pincer  ·  Dijkstra with weighted terrain  ·  fog of war        github.com/Hyperval/maze-runner</a:t>
             </a:r>
           </a:p>
         </p:txBody>

--- a/docs/MazeRunner_Slides.pptx
+++ b/docs/MazeRunner_Slides.pptx
@@ -786,7 +786,7 @@
           <a:lstStyle/>
           <a:p>
             <a:r>
-              <a:t>AKHIL - 60 seconds. This is YOUR feature, so take it properly. The other enemies path to where the player IS, so they always trail. This one predicts where you're going and gets there first. Stage one: it walks forward along your heading and STOPS at junctions - that honesty is the interesting bit, it refuses to guess where it cannot know. Stage two: one flood fill, then the deepest cell on that route it can reach before you - the yellow box. Then the trade-off: ~721 cells of thinking per step against BFS's 328, so it pays for the ability. If asked how often it works: 23-32% within 20 cells, never beyond about 30, because the lookahead bounds how far ahead it can commit. Close: 'That's our project. Code and documentation are on GitHub. Happy to take questions.'</a:t>
+              <a:t>AKHIL — 40 seconds. Pick ONE item, don't read all four. Best is the predictive enemy, because it names a real limitation: the enemy always trails, it never intercepts. 'With more time we'd have it path to where you're heading, so it could cut you off at a junction. That's a different problem - you have to predict intent, not just compute a route.' Then close cleanly and STOP: 'That's our project. Code and documentation are on GitHub. Happy to take questions.'</a:t>
             </a:r>
           </a:p>
         </p:txBody>
@@ -6457,7 +6457,7 @@
     <p:bg>
       <p:bgPr>
         <a:solidFill>
-          <a:srgbClr val="121218"/>
+          <a:srgbClr val="56CCF2"/>
         </a:solidFill>
         <a:effectLst/>
       </p:bgPr>
@@ -6477,8 +6477,8 @@
         </p:nvSpPr>
         <p:spPr>
           <a:xfrm>
-            <a:off x="777240" y="566928"/>
-            <a:ext cx="10637215" cy="1280160"/>
+            <a:off x="777240" y="685800"/>
+            <a:ext cx="10637215" cy="1371600"/>
           </a:xfrm>
           <a:prstGeom prst="rect">
             <a:avLst/>
@@ -6497,13 +6497,13 @@
               </a:spcAft>
               <a:defRPr sz="1300" b="0">
                 <a:solidFill>
-                  <a:srgbClr val="9B59B6"/>
+                  <a:srgbClr val="15506B"/>
                 </a:solidFill>
                 <a:latin typeface="Consolas"/>
               </a:defRPr>
             </a:pPr>
             <a:r>
-              <a:t>BEYOND THE BRIEF</a:t>
+              <a:t>FUTURE SCOPE</a:t>
             </a:r>
           </a:p>
           <a:p>
@@ -6511,43 +6511,65 @@
               <a:spcAft>
                 <a:spcPts val="0"/>
               </a:spcAft>
-              <a:defRPr sz="3800" b="1">
-                <a:solidFill>
-                  <a:srgbClr val="F2F2F7"/>
+              <a:defRPr sz="4000" b="1">
+                <a:solidFill>
+                  <a:srgbClr val="121218"/>
                 </a:solidFill>
                 <a:latin typeface="Segoe UI"/>
               </a:defRPr>
             </a:pPr>
             <a:r>
-              <a:t>An enemy that cuts you off</a:t>
-            </a:r>
-          </a:p>
-        </p:txBody>
-      </p:sp>
-      <p:pic>
-        <p:nvPicPr>
-          <p:cNvPr id="3" name="Picture 2" descr="demo_intercept.png"/>
-          <p:cNvPicPr>
-            <a:picLocks noChangeAspect="1"/>
-          </p:cNvPicPr>
+              <a:t>What we would build next</a:t>
+            </a:r>
+          </a:p>
+        </p:txBody>
+      </p:sp>
+      <p:sp>
+        <p:nvSpPr>
+          <p:cNvPr id="3" name="Rounded Rectangle 2"/>
+          <p:cNvSpPr/>
           <p:nvPr/>
-        </p:nvPicPr>
-        <p:blipFill>
-          <a:blip r:embed="rId2"/>
-          <a:stretch>
-            <a:fillRect/>
-          </a:stretch>
-        </p:blipFill>
-        <p:spPr>
-          <a:xfrm>
-            <a:off x="777240" y="2057400"/>
-            <a:ext cx="6035040" cy="4291332"/>
-          </a:xfrm>
-          <a:prstGeom prst="rect">
-            <a:avLst/>
+        </p:nvSpPr>
+        <p:spPr>
+          <a:xfrm>
+            <a:off x="777240" y="2514600"/>
+            <a:ext cx="2508427" cy="2286000"/>
+          </a:xfrm>
+          <a:prstGeom prst="roundRect">
+            <a:avLst>
+              <a:gd name="adj" fmla="val 6000"/>
+            </a:avLst>
           </a:prstGeom>
-        </p:spPr>
-      </p:pic>
+          <a:solidFill>
+            <a:srgbClr val="EAF8FE"/>
+          </a:solidFill>
+          <a:ln w="12700">
+            <a:solidFill>
+              <a:srgbClr val="8FD9F5"/>
+            </a:solidFill>
+          </a:ln>
+          <a:effectLst/>
+        </p:spPr>
+        <p:style>
+          <a:lnRef idx="1">
+            <a:schemeClr val="accent1"/>
+          </a:lnRef>
+          <a:fillRef idx="3">
+            <a:schemeClr val="accent1"/>
+          </a:fillRef>
+          <a:effectRef idx="2">
+            <a:schemeClr val="accent1"/>
+          </a:effectRef>
+          <a:fontRef idx="minor">
+            <a:schemeClr val="lt1"/>
+          </a:fontRef>
+        </p:style>
+        <p:txBody>
+          <a:bodyPr rtlCol="0" anchor="ctr"/>
+          <a:lstStyle/>
+          <a:p/>
+        </p:txBody>
+      </p:sp>
       <p:sp>
         <p:nvSpPr>
           <p:cNvPr id="4" name="TextBox 3"/>
@@ -6556,8 +6578,8 @@
         </p:nvSpPr>
         <p:spPr>
           <a:xfrm>
-            <a:off x="7132320" y="2057400"/>
-            <a:ext cx="4282135" cy="822960"/>
+            <a:off x="1033272" y="2743200"/>
+            <a:ext cx="1996363" cy="1920240"/>
           </a:xfrm>
           <a:prstGeom prst="rect">
             <a:avLst/>
@@ -6569,6 +6591,22 @@
             <a:spAutoFit/>
           </a:bodyPr>
           <a:lstStyle/>
+          <a:p>
+            <a:pPr>
+              <a:spcAft>
+                <a:spcPts val="700"/>
+              </a:spcAft>
+              <a:defRPr sz="1500" b="1">
+                <a:solidFill>
+                  <a:srgbClr val="121218"/>
+                </a:solidFill>
+                <a:latin typeface="Segoe UI"/>
+              </a:defRPr>
+            </a:pPr>
+            <a:r>
+              <a:t>A predictive enemy</a:t>
+            </a:r>
+          </a:p>
           <a:p>
             <a:pPr>
               <a:lnSpc>
@@ -6577,15 +6615,15 @@
               <a:spcAft>
                 <a:spcPts val="0"/>
               </a:spcAft>
-              <a:defRPr sz="1400" b="0">
-                <a:solidFill>
-                  <a:srgbClr val="C9CEDA"/>
+              <a:defRPr sz="1200" b="0">
+                <a:solidFill>
+                  <a:srgbClr val="2C3A44"/>
                 </a:solidFill>
                 <a:latin typeface="Segoe UI"/>
               </a:defRPr>
             </a:pPr>
             <a:r>
-              <a:t>The other enemies path to where you ARE, so they always trail. This one asks where you will BE.</a:t>
+              <a:t>Right now it chases where you are. An enemy that paths to where you are heading could cut you off at a junction instead of trailing you.</a:t>
             </a:r>
           </a:p>
         </p:txBody>
@@ -6598,8 +6636,8 @@
         </p:nvSpPr>
         <p:spPr>
           <a:xfrm>
-            <a:off x="7132320" y="3063240"/>
-            <a:ext cx="4282135" cy="1298448"/>
+            <a:off x="3486835" y="2514600"/>
+            <a:ext cx="2508427" cy="2286000"/>
           </a:xfrm>
           <a:prstGeom prst="roundRect">
             <a:avLst>
@@ -6607,11 +6645,11 @@
             </a:avLst>
           </a:prstGeom>
           <a:solidFill>
-            <a:srgbClr val="1B1B24"/>
+            <a:srgbClr val="EAF8FE"/>
           </a:solidFill>
           <a:ln w="12700">
             <a:solidFill>
-              <a:srgbClr val="2E2E3C"/>
+              <a:srgbClr val="8FD9F5"/>
             </a:solidFill>
           </a:ln>
           <a:effectLst/>
@@ -6638,58 +6676,14 @@
       </p:sp>
       <p:sp>
         <p:nvSpPr>
-          <p:cNvPr id="6" name="Rectangle 5"/>
-          <p:cNvSpPr/>
-          <p:nvPr/>
-        </p:nvSpPr>
-        <p:spPr>
-          <a:xfrm>
-            <a:off x="7132320" y="3063240"/>
-            <a:ext cx="50292" cy="1298448"/>
-          </a:xfrm>
-          <a:prstGeom prst="rect">
-            <a:avLst/>
-          </a:prstGeom>
-          <a:solidFill>
-            <a:srgbClr val="9B59B6"/>
-          </a:solidFill>
-          <a:ln>
-            <a:noFill/>
-          </a:ln>
-          <a:effectLst/>
-        </p:spPr>
-        <p:style>
-          <a:lnRef idx="1">
-            <a:schemeClr val="accent1"/>
-          </a:lnRef>
-          <a:fillRef idx="3">
-            <a:schemeClr val="accent1"/>
-          </a:fillRef>
-          <a:effectRef idx="2">
-            <a:schemeClr val="accent1"/>
-          </a:effectRef>
-          <a:fontRef idx="minor">
-            <a:schemeClr val="lt1"/>
-          </a:fontRef>
-        </p:style>
-        <p:txBody>
-          <a:bodyPr rtlCol="0" anchor="ctr"/>
-          <a:lstStyle/>
-          <a:p>
-            <a:pPr algn="ctr"/>
-          </a:p>
-        </p:txBody>
-      </p:sp>
-      <p:sp>
-        <p:nvSpPr>
-          <p:cNvPr id="7" name="TextBox 6"/>
+          <p:cNvPr id="6" name="TextBox 5"/>
           <p:cNvSpPr txBox="1"/>
           <p:nvPr/>
         </p:nvSpPr>
         <p:spPr>
           <a:xfrm>
-            <a:off x="7388352" y="3227832"/>
-            <a:ext cx="3770071" cy="1005840"/>
+            <a:off x="3742867" y="2743200"/>
+            <a:ext cx="1996363" cy="1920240"/>
           </a:xfrm>
           <a:prstGeom prst="rect">
             <a:avLst/>
@@ -6704,50 +6698,50 @@
           <a:p>
             <a:pPr>
               <a:spcAft>
-                <a:spcPts val="500"/>
+                <a:spcPts val="700"/>
               </a:spcAft>
-              <a:defRPr sz="1450" b="1">
-                <a:solidFill>
-                  <a:srgbClr val="9B59B6"/>
+              <a:defRPr sz="1500" b="1">
+                <a:solidFill>
+                  <a:srgbClr val="121218"/>
                 </a:solidFill>
                 <a:latin typeface="Segoe UI"/>
               </a:defRPr>
             </a:pPr>
             <a:r>
-              <a:t>1 — Predict the route</a:t>
+              <a:t>Dijkstra with terrain</a:t>
             </a:r>
           </a:p>
           <a:p>
             <a:pPr>
               <a:lnSpc>
-                <a:spcPct val="125000"/>
+                <a:spcPct val="130000"/>
               </a:lnSpc>
               <a:spcAft>
                 <a:spcPts val="0"/>
               </a:spcAft>
-              <a:defRPr sz="1150" b="0">
-                <a:solidFill>
-                  <a:srgbClr val="C9CEDA"/>
+              <a:defRPr sz="1200" b="0">
+                <a:solidFill>
+                  <a:srgbClr val="2C3A44"/>
                 </a:solidFill>
                 <a:latin typeface="Segoe UI"/>
               </a:defRPr>
             </a:pPr>
             <a:r>
-              <a:t>Walk forward along your heading, following forced corridor bends. At a junction it STOPS — it cannot know which way you will turn, and guessing is worse than not guessing.</a:t>
-            </a:r>
-          </a:p>
-        </p:txBody>
-      </p:sp>
-      <p:sp>
-        <p:nvSpPr>
-          <p:cNvPr id="8" name="Rounded Rectangle 7"/>
+              <a:t>Mud cells costing 3 steps instead of 1, to show why BFS is really Dijkstra with every edge weighted the same.</a:t>
+            </a:r>
+          </a:p>
+        </p:txBody>
+      </p:sp>
+      <p:sp>
+        <p:nvSpPr>
+          <p:cNvPr id="7" name="Rounded Rectangle 6"/>
           <p:cNvSpPr/>
           <p:nvPr/>
         </p:nvSpPr>
         <p:spPr>
           <a:xfrm>
-            <a:off x="7132320" y="4526280"/>
-            <a:ext cx="4282135" cy="1298448"/>
+            <a:off x="6196431" y="2514600"/>
+            <a:ext cx="2508427" cy="2286000"/>
           </a:xfrm>
           <a:prstGeom prst="roundRect">
             <a:avLst>
@@ -6755,11 +6749,11 @@
             </a:avLst>
           </a:prstGeom>
           <a:solidFill>
-            <a:srgbClr val="1B1B24"/>
+            <a:srgbClr val="EAF8FE"/>
           </a:solidFill>
           <a:ln w="12700">
             <a:solidFill>
-              <a:srgbClr val="2E2E3C"/>
+              <a:srgbClr val="8FD9F5"/>
             </a:solidFill>
           </a:ln>
           <a:effectLst/>
@@ -6786,23 +6780,85 @@
       </p:sp>
       <p:sp>
         <p:nvSpPr>
-          <p:cNvPr id="9" name="Rectangle 8"/>
-          <p:cNvSpPr/>
+          <p:cNvPr id="8" name="TextBox 7"/>
+          <p:cNvSpPr txBox="1"/>
           <p:nvPr/>
         </p:nvSpPr>
         <p:spPr>
           <a:xfrm>
-            <a:off x="7132320" y="4526280"/>
-            <a:ext cx="50292" cy="1298448"/>
+            <a:off x="6452463" y="2743200"/>
+            <a:ext cx="1996363" cy="1920240"/>
           </a:xfrm>
           <a:prstGeom prst="rect">
             <a:avLst/>
           </a:prstGeom>
+          <a:noFill/>
+        </p:spPr>
+        <p:txBody>
+          <a:bodyPr wrap="square" lIns="0" rIns="0" tIns="0" bIns="0">
+            <a:spAutoFit/>
+          </a:bodyPr>
+          <a:lstStyle/>
+          <a:p>
+            <a:pPr>
+              <a:spcAft>
+                <a:spcPts val="700"/>
+              </a:spcAft>
+              <a:defRPr sz="1500" b="1">
+                <a:solidFill>
+                  <a:srgbClr val="121218"/>
+                </a:solidFill>
+                <a:latin typeface="Segoe UI"/>
+              </a:defRPr>
+            </a:pPr>
+            <a:r>
+              <a:t>A better heuristic</a:t>
+            </a:r>
+          </a:p>
+          <a:p>
+            <a:pPr>
+              <a:lnSpc>
+                <a:spcPct val="130000"/>
+              </a:lnSpc>
+              <a:spcAft>
+                <a:spcPts val="0"/>
+              </a:spcAft>
+              <a:defRPr sz="1200" b="0">
+                <a:solidFill>
+                  <a:srgbClr val="2C3A44"/>
+                </a:solidFill>
+                <a:latin typeface="Segoe UI"/>
+              </a:defRPr>
+            </a:pPr>
+            <a:r>
+              <a:t>Manhattan distance is weak in a twisty maze. One that accounts for walls would widen A*'s lead — if it can be computed cheaply enough to pay for itself.</a:t>
+            </a:r>
+          </a:p>
+        </p:txBody>
+      </p:sp>
+      <p:sp>
+        <p:nvSpPr>
+          <p:cNvPr id="9" name="Rounded Rectangle 8"/>
+          <p:cNvSpPr/>
+          <p:nvPr/>
+        </p:nvSpPr>
+        <p:spPr>
+          <a:xfrm>
+            <a:off x="8906027" y="2514600"/>
+            <a:ext cx="2508427" cy="2286000"/>
+          </a:xfrm>
+          <a:prstGeom prst="roundRect">
+            <a:avLst>
+              <a:gd name="adj" fmla="val 6000"/>
+            </a:avLst>
+          </a:prstGeom>
           <a:solidFill>
-            <a:srgbClr val="FFD666"/>
+            <a:srgbClr val="EAF8FE"/>
           </a:solidFill>
-          <a:ln>
-            <a:noFill/>
+          <a:ln w="12700">
+            <a:solidFill>
+              <a:srgbClr val="8FD9F5"/>
+            </a:solidFill>
           </a:ln>
           <a:effectLst/>
         </p:spPr>
@@ -6823,9 +6879,7 @@
         <p:txBody>
           <a:bodyPr rtlCol="0" anchor="ctr"/>
           <a:lstStyle/>
-          <a:p>
-            <a:pPr algn="ctr"/>
-          </a:p>
+          <a:p/>
         </p:txBody>
       </p:sp>
       <p:sp>
@@ -6836,8 +6890,8 @@
         </p:nvSpPr>
         <p:spPr>
           <a:xfrm>
-            <a:off x="7388352" y="4690872"/>
-            <a:ext cx="3770071" cy="1005840"/>
+            <a:off x="9162059" y="2743200"/>
+            <a:ext cx="1996363" cy="1920240"/>
           </a:xfrm>
           <a:prstGeom prst="rect">
             <a:avLst/>
@@ -6852,36 +6906,36 @@
           <a:p>
             <a:pPr>
               <a:spcAft>
-                <a:spcPts val="500"/>
+                <a:spcPts val="700"/>
               </a:spcAft>
-              <a:defRPr sz="1450" b="1">
-                <a:solidFill>
-                  <a:srgbClr val="FFD666"/>
+              <a:defRPr sz="1500" b="1">
+                <a:solidFill>
+                  <a:srgbClr val="121218"/>
                 </a:solidFill>
                 <a:latin typeface="Segoe UI"/>
               </a:defRPr>
             </a:pPr>
             <a:r>
-              <a:t>2 — Find the cut-off</a:t>
+              <a:t>Fog of war</a:t>
             </a:r>
           </a:p>
           <a:p>
             <a:pPr>
               <a:lnSpc>
-                <a:spcPct val="125000"/>
+                <a:spcPct val="130000"/>
               </a:lnSpc>
               <a:spcAft>
                 <a:spcPts val="0"/>
               </a:spcAft>
-              <a:defRPr sz="1150" b="0">
-                <a:solidFill>
-                  <a:srgbClr val="C9CEDA"/>
+              <a:defRPr sz="1200" b="0">
+                <a:solidFill>
+                  <a:srgbClr val="2C3A44"/>
                 </a:solidFill>
                 <a:latin typeface="Segoe UI"/>
               </a:defRPr>
             </a:pPr>
             <a:r>
-              <a:t>One flood fill gives its distance to every cell. It takes the deepest cell on your route it can reach no later than you — the yellow box.</a:t>
+              <a:t>Limit the player's vision radius, so the maze has to be learned rather than read off the screen in one glance.</a:t>
             </a:r>
           </a:p>
         </p:txBody>
@@ -6894,8 +6948,8 @@
         </p:nvSpPr>
         <p:spPr>
           <a:xfrm>
-            <a:off x="7132320" y="5943600"/>
-            <a:ext cx="4282135" cy="457200"/>
+            <a:off x="777240" y="5349240"/>
+            <a:ext cx="10637215" cy="548640"/>
           </a:xfrm>
           <a:prstGeom prst="rect">
             <a:avLst/>
@@ -6909,60 +6963,34 @@
           <a:lstStyle/>
           <a:p>
             <a:pPr>
-              <a:lnSpc>
-                <a:spcPct val="125000"/>
-              </a:lnSpc>
               <a:spcAft>
-                <a:spcPts val="0"/>
+                <a:spcPts val="600"/>
               </a:spcAft>
-              <a:defRPr sz="1100" b="0">
-                <a:solidFill>
-                  <a:srgbClr val="6A7179"/>
-                </a:solidFill>
-                <a:latin typeface="Segoe UI"/>
+              <a:defRPr sz="1600" b="1">
+                <a:solidFill>
+                  <a:srgbClr val="121218"/>
+                </a:solidFill>
+                <a:latin typeface="Consolas"/>
               </a:defRPr>
             </a:pPr>
             <a:r>
-              <a:t>Costs ~721 cells of thinking per step against BFS's 328. It pays for the ability.</a:t>
-            </a:r>
-          </a:p>
-        </p:txBody>
-      </p:sp>
-      <p:sp>
-        <p:nvSpPr>
-          <p:cNvPr id="12" name="TextBox 11"/>
-          <p:cNvSpPr txBox="1"/>
-          <p:nvPr/>
-        </p:nvSpPr>
-        <p:spPr>
-          <a:xfrm>
-            <a:off x="777240" y="6199632"/>
-            <a:ext cx="10637215" cy="411480"/>
-          </a:xfrm>
-          <a:prstGeom prst="rect">
-            <a:avLst/>
-          </a:prstGeom>
-          <a:noFill/>
-        </p:spPr>
-        <p:txBody>
-          <a:bodyPr wrap="square" lIns="0" rIns="0" tIns="0" bIns="0">
-            <a:spAutoFit/>
-          </a:bodyPr>
-          <a:lstStyle/>
+              <a:t>github.com/Hyperval/maze-runner</a:t>
+            </a:r>
+          </a:p>
           <a:p>
             <a:pPr>
               <a:spcAft>
                 <a:spcPts val="0"/>
               </a:spcAft>
-              <a:defRPr sz="1050" b="0">
-                <a:solidFill>
-                  <a:srgbClr val="6A7179"/>
+              <a:defRPr sz="1600" b="0">
+                <a:solidFill>
+                  <a:srgbClr val="15506B"/>
                 </a:solidFill>
                 <a:latin typeface="Segoe UI"/>
               </a:defRPr>
             </a:pPr>
             <a:r>
-              <a:t>Still ahead: enemies that cooperate to pincer  ·  Dijkstra with weighted terrain  ·  fog of war        github.com/Hyperval/maze-runner</a:t>
+              <a:t>Thank you — questions welcome.</a:t>
             </a:r>
           </a:p>
         </p:txBody>

--- a/docs/MazeRunner_Slides.pptx
+++ b/docs/MazeRunner_Slides.pptx
@@ -646,7 +646,7 @@
           <a:lstStyle/>
           <a:p>
             <a:r>
-              <a:t>ABDULLAH — 30 seconds, keep it short. Do NOT read all seven boxes. Land one point: the bottom row is tooling we wrote to check our own work, not game features. 'We didn't just build it, we built the things that tell us whether it works.' Then go straight into the live demo - you drive, Akshay narrates the algorithm.</a:t>
+              <a:t>AKHIL presents the top half (this is your work), ABDULLAH the bottom strip. AKHIL - 45 seconds: the maze is carved at runtime by a recursive backtracker, which is depth-first search used to dig instead of to search. Key detail: carving TWO cells at a time, so walls land on even coordinates and stay one cell thick - one at a time and the grid dissolves into an open room. Then braiding: a finished maze is 'perfect', one route between any two cells, so it is all dead ends and the player gets cornered, so we reopen 35 percent. Mention the measured side effect: that also widened A*'s advantage from 11 to 26 percent. You can run visualise_maze.py live if they want to watch it carve. ABDULLAH - 15 seconds on the three boxes; the point is the right-hand one, that tooling is ours, written to check our own work.</a:t>
             </a:r>
           </a:p>
         </p:txBody>
@@ -4353,7 +4353,7 @@
               </a:defRPr>
             </a:pPr>
             <a:r>
-              <a:t>REVA University  ·  B25CS0311 Portfolio Building  ·  Hackathon Abhinava  ·  07/10/2026</a:t>
+              <a:t>REVA University  ·  B25CS0311 Portfolio Building  ·  07/10/2026</a:t>
             </a:r>
           </a:p>
         </p:txBody>
@@ -4864,7 +4864,7 @@
               </a:defRPr>
             </a:pPr>
             <a:r>
-              <a:t>How it fits together</a:t>
+              <a:t>Building the maze</a:t>
             </a:r>
           </a:p>
           <a:p>
@@ -4883,21 +4883,45 @@
               </a:defRPr>
             </a:pPr>
             <a:r>
-              <a:t>Five modules for the game, two standalone tools that measure it. No dataset, no network, no hardware.</a:t>
-            </a:r>
-          </a:p>
-        </p:txBody>
-      </p:sp>
-      <p:sp>
-        <p:nvSpPr>
-          <p:cNvPr id="3" name="Rounded Rectangle 2"/>
+              <a:t>A recursive backtracker carves it at runtime — depth-first search used to dig instead of to search.</a:t>
+            </a:r>
+          </a:p>
+        </p:txBody>
+      </p:sp>
+      <p:pic>
+        <p:nvPicPr>
+          <p:cNvPr id="3" name="Picture 2" descr="demo_carving.png"/>
+          <p:cNvPicPr>
+            <a:picLocks noChangeAspect="1"/>
+          </p:cNvPicPr>
+          <p:nvPr/>
+        </p:nvPicPr>
+        <p:blipFill>
+          <a:blip r:embed="rId2"/>
+          <a:stretch>
+            <a:fillRect/>
+          </a:stretch>
+        </p:blipFill>
+        <p:spPr>
+          <a:xfrm>
+            <a:off x="777240" y="1920240"/>
+            <a:ext cx="5760720" cy="4517091"/>
+          </a:xfrm>
+          <a:prstGeom prst="rect">
+            <a:avLst/>
+          </a:prstGeom>
+        </p:spPr>
+      </p:pic>
+      <p:sp>
+        <p:nvSpPr>
+          <p:cNvPr id="4" name="Rounded Rectangle 3"/>
           <p:cNvSpPr/>
           <p:nvPr/>
         </p:nvSpPr>
         <p:spPr>
           <a:xfrm>
-            <a:off x="777240" y="2286000"/>
-            <a:ext cx="2508427" cy="1508760"/>
+            <a:off x="6903720" y="1920240"/>
+            <a:ext cx="4510735" cy="1600200"/>
           </a:xfrm>
           <a:prstGeom prst="roundRect">
             <a:avLst>
@@ -4936,14 +4960,58 @@
       </p:sp>
       <p:sp>
         <p:nvSpPr>
-          <p:cNvPr id="4" name="TextBox 3"/>
+          <p:cNvPr id="5" name="Rectangle 4"/>
+          <p:cNvSpPr/>
+          <p:nvPr/>
+        </p:nvSpPr>
+        <p:spPr>
+          <a:xfrm>
+            <a:off x="6903720" y="1920240"/>
+            <a:ext cx="50292" cy="1600200"/>
+          </a:xfrm>
+          <a:prstGeom prst="rect">
+            <a:avLst/>
+          </a:prstGeom>
+          <a:solidFill>
+            <a:srgbClr val="56CCF2"/>
+          </a:solidFill>
+          <a:ln>
+            <a:noFill/>
+          </a:ln>
+          <a:effectLst/>
+        </p:spPr>
+        <p:style>
+          <a:lnRef idx="1">
+            <a:schemeClr val="accent1"/>
+          </a:lnRef>
+          <a:fillRef idx="3">
+            <a:schemeClr val="accent1"/>
+          </a:fillRef>
+          <a:effectRef idx="2">
+            <a:schemeClr val="accent1"/>
+          </a:effectRef>
+          <a:fontRef idx="minor">
+            <a:schemeClr val="lt1"/>
+          </a:fontRef>
+        </p:style>
+        <p:txBody>
+          <a:bodyPr rtlCol="0" anchor="ctr"/>
+          <a:lstStyle/>
+          <a:p>
+            <a:pPr algn="ctr"/>
+          </a:p>
+        </p:txBody>
+      </p:sp>
+      <p:sp>
+        <p:nvSpPr>
+          <p:cNvPr id="6" name="TextBox 5"/>
           <p:cNvSpPr txBox="1"/>
           <p:nvPr/>
         </p:nvSpPr>
         <p:spPr>
           <a:xfrm>
-            <a:off x="1014984" y="2487168"/>
-            <a:ext cx="2032939" cy="1188720"/>
+            <a:off x="7159752" y="2103120"/>
+            <a:ext cx="3998671" cy="1280160"/>
           </a:xfrm>
           <a:prstGeom prst="rect">
             <a:avLst/>
@@ -4958,28 +5026,28 @@
           <a:p>
             <a:pPr>
               <a:spcAft>
-                <a:spcPts val="700"/>
+                <a:spcPts val="500"/>
               </a:spcAft>
-              <a:defRPr sz="1250" b="0">
+              <a:defRPr sz="1500" b="1">
                 <a:solidFill>
                   <a:srgbClr val="56CCF2"/>
                 </a:solidFill>
-                <a:latin typeface="Consolas"/>
+                <a:latin typeface="Segoe UI"/>
               </a:defRPr>
             </a:pPr>
             <a:r>
-              <a:t>pathfinding.py</a:t>
+              <a:t>Carve two cells at a time</a:t>
             </a:r>
           </a:p>
           <a:p>
             <a:pPr>
               <a:lnSpc>
-                <a:spcPct val="130000"/>
+                <a:spcPct val="125000"/>
               </a:lnSpc>
               <a:spcAft>
                 <a:spcPts val="0"/>
               </a:spcAft>
-              <a:defRPr sz="1200" b="0">
+              <a:defRPr sz="1150" b="0">
                 <a:solidFill>
                   <a:srgbClr val="C9CEDA"/>
                 </a:solidFill>
@@ -4987,21 +5055,21 @@
               </a:defRPr>
             </a:pPr>
             <a:r>
-              <a:t>BFS, A*, flood-fill distance maps. The technical core.</a:t>
-            </a:r>
-          </a:p>
-        </p:txBody>
-      </p:sp>
-      <p:sp>
-        <p:nvSpPr>
-          <p:cNvPr id="5" name="Rounded Rectangle 4"/>
+              <a:t>Pick a random neighbour TWO cells away and knock out the wall between. Dead end? Pop the stack and back up. Two cells keeps walls on even coordinates and one cell thick — one at a time dissolves the grid into an open room.</a:t>
+            </a:r>
+          </a:p>
+        </p:txBody>
+      </p:sp>
+      <p:sp>
+        <p:nvSpPr>
+          <p:cNvPr id="7" name="Rounded Rectangle 6"/>
           <p:cNvSpPr/>
           <p:nvPr/>
         </p:nvSpPr>
         <p:spPr>
           <a:xfrm>
-            <a:off x="3486835" y="2286000"/>
-            <a:ext cx="2508427" cy="1508760"/>
+            <a:off x="6903720" y="3703320"/>
+            <a:ext cx="4510735" cy="1600200"/>
           </a:xfrm>
           <a:prstGeom prst="roundRect">
             <a:avLst>
@@ -5040,14 +5108,58 @@
       </p:sp>
       <p:sp>
         <p:nvSpPr>
-          <p:cNvPr id="6" name="TextBox 5"/>
+          <p:cNvPr id="8" name="Rectangle 7"/>
+          <p:cNvSpPr/>
+          <p:nvPr/>
+        </p:nvSpPr>
+        <p:spPr>
+          <a:xfrm>
+            <a:off x="6903720" y="3703320"/>
+            <a:ext cx="50292" cy="1600200"/>
+          </a:xfrm>
+          <a:prstGeom prst="rect">
+            <a:avLst/>
+          </a:prstGeom>
+          <a:solidFill>
+            <a:srgbClr val="2D9D78"/>
+          </a:solidFill>
+          <a:ln>
+            <a:noFill/>
+          </a:ln>
+          <a:effectLst/>
+        </p:spPr>
+        <p:style>
+          <a:lnRef idx="1">
+            <a:schemeClr val="accent1"/>
+          </a:lnRef>
+          <a:fillRef idx="3">
+            <a:schemeClr val="accent1"/>
+          </a:fillRef>
+          <a:effectRef idx="2">
+            <a:schemeClr val="accent1"/>
+          </a:effectRef>
+          <a:fontRef idx="minor">
+            <a:schemeClr val="lt1"/>
+          </a:fontRef>
+        </p:style>
+        <p:txBody>
+          <a:bodyPr rtlCol="0" anchor="ctr"/>
+          <a:lstStyle/>
+          <a:p>
+            <a:pPr algn="ctr"/>
+          </a:p>
+        </p:txBody>
+      </p:sp>
+      <p:sp>
+        <p:nvSpPr>
+          <p:cNvPr id="9" name="TextBox 8"/>
           <p:cNvSpPr txBox="1"/>
           <p:nvPr/>
         </p:nvSpPr>
         <p:spPr>
           <a:xfrm>
-            <a:off x="3724579" y="2487168"/>
-            <a:ext cx="2032939" cy="1188720"/>
+            <a:off x="7159752" y="3886200"/>
+            <a:ext cx="3998671" cy="1280160"/>
           </a:xfrm>
           <a:prstGeom prst="rect">
             <a:avLst/>
@@ -5062,28 +5174,28 @@
           <a:p>
             <a:pPr>
               <a:spcAft>
-                <a:spcPts val="700"/>
+                <a:spcPts val="500"/>
               </a:spcAft>
-              <a:defRPr sz="1250" b="0">
-                <a:solidFill>
-                  <a:srgbClr val="56CCF2"/>
-                </a:solidFill>
-                <a:latin typeface="Consolas"/>
+              <a:defRPr sz="1500" b="1">
+                <a:solidFill>
+                  <a:srgbClr val="2D9D78"/>
+                </a:solidFill>
+                <a:latin typeface="Segoe UI"/>
               </a:defRPr>
             </a:pPr>
             <a:r>
-              <a:t>maze.py</a:t>
+              <a:t>Then braid it open</a:t>
             </a:r>
           </a:p>
           <a:p>
             <a:pPr>
               <a:lnSpc>
-                <a:spcPct val="130000"/>
+                <a:spcPct val="125000"/>
               </a:lnSpc>
               <a:spcAft>
                 <a:spcPts val="0"/>
               </a:spcAft>
-              <a:defRPr sz="1200" b="0">
+              <a:defRPr sz="1150" b="0">
                 <a:solidFill>
                   <a:srgbClr val="C9CEDA"/>
                 </a:solidFill>
@@ -5091,21 +5203,21 @@
               </a:defRPr>
             </a:pPr>
             <a:r>
-              <a:t>Recursive-backtracker carving, braiding for escape routes.</a:t>
-            </a:r>
-          </a:p>
-        </p:txBody>
-      </p:sp>
-      <p:sp>
-        <p:nvSpPr>
-          <p:cNvPr id="7" name="Rounded Rectangle 6"/>
+              <a:t>A finished maze is perfect — one route between any two cells, so it is nothing but dead ends and the player gets cornered. We reopen 35% into loops. That also widened A*'s lead from 11% to 26%.</a:t>
+            </a:r>
+          </a:p>
+        </p:txBody>
+      </p:sp>
+      <p:sp>
+        <p:nvSpPr>
+          <p:cNvPr id="10" name="Rounded Rectangle 9"/>
           <p:cNvSpPr/>
           <p:nvPr/>
         </p:nvSpPr>
         <p:spPr>
           <a:xfrm>
-            <a:off x="6196431" y="2286000"/>
-            <a:ext cx="2508427" cy="1508760"/>
+            <a:off x="777240" y="5532120"/>
+            <a:ext cx="3423818" cy="713232"/>
           </a:xfrm>
           <a:prstGeom prst="roundRect">
             <a:avLst>
@@ -5144,14 +5256,14 @@
       </p:sp>
       <p:sp>
         <p:nvSpPr>
-          <p:cNvPr id="8" name="TextBox 7"/>
+          <p:cNvPr id="11" name="TextBox 10"/>
           <p:cNvSpPr txBox="1"/>
           <p:nvPr/>
         </p:nvSpPr>
         <p:spPr>
           <a:xfrm>
-            <a:off x="6434175" y="2487168"/>
-            <a:ext cx="2032939" cy="1188720"/>
+            <a:off x="996696" y="5641848"/>
+            <a:ext cx="2984906" cy="548640"/>
           </a:xfrm>
           <a:prstGeom prst="rect">
             <a:avLst/>
@@ -5166,50 +5278,47 @@
           <a:p>
             <a:pPr>
               <a:spcAft>
-                <a:spcPts val="700"/>
+                <a:spcPts val="200"/>
               </a:spcAft>
-              <a:defRPr sz="1250" b="0">
-                <a:solidFill>
-                  <a:srgbClr val="56CCF2"/>
+              <a:defRPr sz="1050" b="0">
+                <a:solidFill>
+                  <a:srgbClr val="9BA3B4"/>
                 </a:solidFill>
                 <a:latin typeface="Consolas"/>
               </a:defRPr>
             </a:pPr>
             <a:r>
-              <a:t>entities.py</a:t>
+              <a:t>STACK</a:t>
             </a:r>
           </a:p>
           <a:p>
             <a:pPr>
-              <a:lnSpc>
-                <a:spcPct val="130000"/>
-              </a:lnSpc>
               <a:spcAft>
                 <a:spcPts val="0"/>
               </a:spcAft>
               <a:defRPr sz="1200" b="0">
                 <a:solidFill>
-                  <a:srgbClr val="C9CEDA"/>
+                  <a:srgbClr val="F2F2F7"/>
                 </a:solidFill>
                 <a:latin typeface="Segoe UI"/>
               </a:defRPr>
             </a:pPr>
             <a:r>
-              <a:t>Player, Enemy, Coin. Each enemy holds its own algorithm.</a:t>
-            </a:r>
-          </a:p>
-        </p:txBody>
-      </p:sp>
-      <p:sp>
-        <p:nvSpPr>
-          <p:cNvPr id="9" name="Rounded Rectangle 8"/>
+              <a:t>Python 3 · pygame-ce · matplotlib</a:t>
+            </a:r>
+          </a:p>
+        </p:txBody>
+      </p:sp>
+      <p:sp>
+        <p:nvSpPr>
+          <p:cNvPr id="12" name="Rounded Rectangle 11"/>
           <p:cNvSpPr/>
           <p:nvPr/>
         </p:nvSpPr>
         <p:spPr>
           <a:xfrm>
-            <a:off x="8906027" y="2286000"/>
-            <a:ext cx="2508427" cy="1508760"/>
+            <a:off x="4383938" y="5532120"/>
+            <a:ext cx="3423818" cy="713232"/>
           </a:xfrm>
           <a:prstGeom prst="roundRect">
             <a:avLst>
@@ -5248,14 +5357,14 @@
       </p:sp>
       <p:sp>
         <p:nvSpPr>
-          <p:cNvPr id="10" name="TextBox 9"/>
+          <p:cNvPr id="13" name="TextBox 12"/>
           <p:cNvSpPr txBox="1"/>
           <p:nvPr/>
         </p:nvSpPr>
         <p:spPr>
           <a:xfrm>
-            <a:off x="9143771" y="2487168"/>
-            <a:ext cx="2032939" cy="1188720"/>
+            <a:off x="4603394" y="5641848"/>
+            <a:ext cx="2984906" cy="548640"/>
           </a:xfrm>
           <a:prstGeom prst="rect">
             <a:avLst/>
@@ -5270,50 +5379,47 @@
           <a:p>
             <a:pPr>
               <a:spcAft>
-                <a:spcPts val="700"/>
+                <a:spcPts val="200"/>
               </a:spcAft>
-              <a:defRPr sz="1250" b="0">
-                <a:solidFill>
-                  <a:srgbClr val="56CCF2"/>
+              <a:defRPr sz="1050" b="0">
+                <a:solidFill>
+                  <a:srgbClr val="9BA3B4"/>
                 </a:solidFill>
                 <a:latin typeface="Consolas"/>
               </a:defRPr>
             </a:pPr>
             <a:r>
-              <a:t>main.py</a:t>
+              <a:t>ALGORITHMS</a:t>
             </a:r>
           </a:p>
           <a:p>
             <a:pPr>
-              <a:lnSpc>
-                <a:spcPct val="130000"/>
-              </a:lnSpc>
               <a:spcAft>
                 <a:spcPts val="0"/>
               </a:spcAft>
               <a:defRPr sz="1200" b="0">
                 <a:solidFill>
-                  <a:srgbClr val="C9CEDA"/>
+                  <a:srgbClr val="F2F2F7"/>
                 </a:solidFill>
                 <a:latin typeface="Segoe UI"/>
               </a:defRPr>
             </a:pPr>
             <a:r>
-              <a:t>Game loop, state machine, rendering, the search overlay.</a:t>
-            </a:r>
-          </a:p>
-        </p:txBody>
-      </p:sp>
-      <p:sp>
-        <p:nvSpPr>
-          <p:cNvPr id="11" name="Rounded Rectangle 10"/>
+              <a:t>BFS · A* · flood fill · backtracker</a:t>
+            </a:r>
+          </a:p>
+        </p:txBody>
+      </p:sp>
+      <p:sp>
+        <p:nvSpPr>
+          <p:cNvPr id="14" name="Rounded Rectangle 13"/>
           <p:cNvSpPr/>
           <p:nvPr/>
         </p:nvSpPr>
         <p:spPr>
           <a:xfrm>
-            <a:off x="777240" y="4069080"/>
-            <a:ext cx="3411626" cy="1554480"/>
+            <a:off x="7990636" y="5532120"/>
+            <a:ext cx="3423818" cy="713232"/>
           </a:xfrm>
           <a:prstGeom prst="roundRect">
             <a:avLst>
@@ -5352,58 +5458,14 @@
       </p:sp>
       <p:sp>
         <p:nvSpPr>
-          <p:cNvPr id="12" name="Rectangle 11"/>
-          <p:cNvSpPr/>
-          <p:nvPr/>
-        </p:nvSpPr>
-        <p:spPr>
-          <a:xfrm>
-            <a:off x="777240" y="4069080"/>
-            <a:ext cx="3411626" cy="45720"/>
-          </a:xfrm>
-          <a:prstGeom prst="rect">
-            <a:avLst/>
-          </a:prstGeom>
-          <a:solidFill>
-            <a:srgbClr val="2D9D78"/>
-          </a:solidFill>
-          <a:ln>
-            <a:noFill/>
-          </a:ln>
-          <a:effectLst/>
-        </p:spPr>
-        <p:style>
-          <a:lnRef idx="1">
-            <a:schemeClr val="accent1"/>
-          </a:lnRef>
-          <a:fillRef idx="3">
-            <a:schemeClr val="accent1"/>
-          </a:fillRef>
-          <a:effectRef idx="2">
-            <a:schemeClr val="accent1"/>
-          </a:effectRef>
-          <a:fontRef idx="minor">
-            <a:schemeClr val="lt1"/>
-          </a:fontRef>
-        </p:style>
-        <p:txBody>
-          <a:bodyPr rtlCol="0" anchor="ctr"/>
-          <a:lstStyle/>
-          <a:p>
-            <a:pPr algn="ctr"/>
-          </a:p>
-        </p:txBody>
-      </p:sp>
-      <p:sp>
-        <p:nvSpPr>
-          <p:cNvPr id="13" name="TextBox 12"/>
+          <p:cNvPr id="15" name="TextBox 14"/>
           <p:cNvSpPr txBox="1"/>
           <p:nvPr/>
         </p:nvSpPr>
         <p:spPr>
           <a:xfrm>
-            <a:off x="1014984" y="4315968"/>
-            <a:ext cx="2936138" cy="1188720"/>
+            <a:off x="8210092" y="5641848"/>
+            <a:ext cx="2984906" cy="548640"/>
           </a:xfrm>
           <a:prstGeom prst="rect">
             <a:avLst/>
@@ -5418,9 +5480,9 @@
           <a:p>
             <a:pPr>
               <a:spcAft>
-                <a:spcPts val="700"/>
+                <a:spcPts val="200"/>
               </a:spcAft>
-              <a:defRPr sz="1250" b="0">
+              <a:defRPr sz="1050" b="0">
                 <a:solidFill>
                   <a:srgbClr val="2D9D78"/>
                 </a:solidFill>
@@ -5428,117 +5490,24 @@
               </a:defRPr>
             </a:pPr>
             <a:r>
-              <a:t>benchmark.py</a:t>
+              <a:t>OUR TOOLING</a:t>
             </a:r>
           </a:p>
           <a:p>
             <a:pPr>
-              <a:lnSpc>
-                <a:spcPct val="130000"/>
-              </a:lnSpc>
               <a:spcAft>
                 <a:spcPts val="0"/>
               </a:spcAft>
               <a:defRPr sz="1200" b="0">
                 <a:solidFill>
-                  <a:srgbClr val="C9CEDA"/>
+                  <a:srgbClr val="F2F2F7"/>
                 </a:solidFill>
                 <a:latin typeface="Segoe UI"/>
               </a:defRPr>
             </a:pPr>
             <a:r>
-              <a:t>Runs BFS against A* over 50 generated mazes and charts it.</a:t>
-            </a:r>
-          </a:p>
-        </p:txBody>
-      </p:sp>
-      <p:sp>
-        <p:nvSpPr>
-          <p:cNvPr id="14" name="Rounded Rectangle 13"/>
-          <p:cNvSpPr/>
-          <p:nvPr/>
-        </p:nvSpPr>
-        <p:spPr>
-          <a:xfrm>
-            <a:off x="4390034" y="4069080"/>
-            <a:ext cx="3411626" cy="1554480"/>
-          </a:xfrm>
-          <a:prstGeom prst="roundRect">
-            <a:avLst>
-              <a:gd name="adj" fmla="val 6000"/>
-            </a:avLst>
-          </a:prstGeom>
-          <a:solidFill>
-            <a:srgbClr val="1B1B24"/>
-          </a:solidFill>
-          <a:ln w="12700">
-            <a:solidFill>
-              <a:srgbClr val="2E2E3C"/>
-            </a:solidFill>
-          </a:ln>
-          <a:effectLst/>
-        </p:spPr>
-        <p:style>
-          <a:lnRef idx="1">
-            <a:schemeClr val="accent1"/>
-          </a:lnRef>
-          <a:fillRef idx="3">
-            <a:schemeClr val="accent1"/>
-          </a:fillRef>
-          <a:effectRef idx="2">
-            <a:schemeClr val="accent1"/>
-          </a:effectRef>
-          <a:fontRef idx="minor">
-            <a:schemeClr val="lt1"/>
-          </a:fontRef>
-        </p:style>
-        <p:txBody>
-          <a:bodyPr rtlCol="0" anchor="ctr"/>
-          <a:lstStyle/>
-          <a:p/>
-        </p:txBody>
-      </p:sp>
-      <p:sp>
-        <p:nvSpPr>
-          <p:cNvPr id="15" name="Rectangle 14"/>
-          <p:cNvSpPr/>
-          <p:nvPr/>
-        </p:nvSpPr>
-        <p:spPr>
-          <a:xfrm>
-            <a:off x="4390034" y="4069080"/>
-            <a:ext cx="3411626" cy="45720"/>
-          </a:xfrm>
-          <a:prstGeom prst="rect">
-            <a:avLst/>
-          </a:prstGeom>
-          <a:solidFill>
-            <a:srgbClr val="2D9D78"/>
-          </a:solidFill>
-          <a:ln>
-            <a:noFill/>
-          </a:ln>
-          <a:effectLst/>
-        </p:spPr>
-        <p:style>
-          <a:lnRef idx="1">
-            <a:schemeClr val="accent1"/>
-          </a:lnRef>
-          <a:fillRef idx="3">
-            <a:schemeClr val="accent1"/>
-          </a:fillRef>
-          <a:effectRef idx="2">
-            <a:schemeClr val="accent1"/>
-          </a:effectRef>
-          <a:fontRef idx="minor">
-            <a:schemeClr val="lt1"/>
-          </a:fontRef>
-        </p:style>
-        <p:txBody>
-          <a:bodyPr rtlCol="0" anchor="ctr"/>
-          <a:lstStyle/>
-          <a:p>
-            <a:pPr algn="ctr"/>
+              <a:t>benchmark · autoplay · 226 tests</a:t>
+            </a:r>
           </a:p>
         </p:txBody>
       </p:sp>
@@ -5550,8 +5519,8 @@
         </p:nvSpPr>
         <p:spPr>
           <a:xfrm>
-            <a:off x="4627778" y="4315968"/>
-            <a:ext cx="2936138" cy="1188720"/>
+            <a:off x="777240" y="6309360"/>
+            <a:ext cx="10637215" cy="365760"/>
           </a:xfrm>
           <a:prstGeom prst="rect">
             <a:avLst/>
@@ -5566,223 +5535,17 @@
           <a:p>
             <a:pPr>
               <a:spcAft>
-                <a:spcPts val="700"/>
-              </a:spcAft>
-              <a:defRPr sz="1250" b="0">
-                <a:solidFill>
-                  <a:srgbClr val="2D9D78"/>
-                </a:solidFill>
-                <a:latin typeface="Consolas"/>
-              </a:defRPr>
-            </a:pPr>
-            <a:r>
-              <a:t>autoplay.py</a:t>
-            </a:r>
-          </a:p>
-          <a:p>
-            <a:pPr>
-              <a:lnSpc>
-                <a:spcPct val="130000"/>
-              </a:lnSpc>
-              <a:spcAft>
                 <a:spcPts val="0"/>
               </a:spcAft>
-              <a:defRPr sz="1200" b="0">
-                <a:solidFill>
-                  <a:srgbClr val="C9CEDA"/>
-                </a:solidFill>
-                <a:latin typeface="Segoe UI"/>
+              <a:defRPr sz="1050" b="0">
+                <a:solidFill>
+                  <a:srgbClr val="6A7179"/>
+                </a:solidFill>
+                <a:latin typeface="Consolas"/>
               </a:defRPr>
             </a:pPr>
             <a:r>
-              <a:t>Plays the game headlessly hundreds of times, hunting crashes.</a:t>
-            </a:r>
-          </a:p>
-        </p:txBody>
-      </p:sp>
-      <p:sp>
-        <p:nvSpPr>
-          <p:cNvPr id="17" name="Rounded Rectangle 16"/>
-          <p:cNvSpPr/>
-          <p:nvPr/>
-        </p:nvSpPr>
-        <p:spPr>
-          <a:xfrm>
-            <a:off x="8002828" y="4069080"/>
-            <a:ext cx="3411626" cy="1554480"/>
-          </a:xfrm>
-          <a:prstGeom prst="roundRect">
-            <a:avLst>
-              <a:gd name="adj" fmla="val 6000"/>
-            </a:avLst>
-          </a:prstGeom>
-          <a:solidFill>
-            <a:srgbClr val="1B1B24"/>
-          </a:solidFill>
-          <a:ln w="12700">
-            <a:solidFill>
-              <a:srgbClr val="2E2E3C"/>
-            </a:solidFill>
-          </a:ln>
-          <a:effectLst/>
-        </p:spPr>
-        <p:style>
-          <a:lnRef idx="1">
-            <a:schemeClr val="accent1"/>
-          </a:lnRef>
-          <a:fillRef idx="3">
-            <a:schemeClr val="accent1"/>
-          </a:fillRef>
-          <a:effectRef idx="2">
-            <a:schemeClr val="accent1"/>
-          </a:effectRef>
-          <a:fontRef idx="minor">
-            <a:schemeClr val="lt1"/>
-          </a:fontRef>
-        </p:style>
-        <p:txBody>
-          <a:bodyPr rtlCol="0" anchor="ctr"/>
-          <a:lstStyle/>
-          <a:p/>
-        </p:txBody>
-      </p:sp>
-      <p:sp>
-        <p:nvSpPr>
-          <p:cNvPr id="18" name="Rectangle 17"/>
-          <p:cNvSpPr/>
-          <p:nvPr/>
-        </p:nvSpPr>
-        <p:spPr>
-          <a:xfrm>
-            <a:off x="8002828" y="4069080"/>
-            <a:ext cx="3411626" cy="45720"/>
-          </a:xfrm>
-          <a:prstGeom prst="rect">
-            <a:avLst/>
-          </a:prstGeom>
-          <a:solidFill>
-            <a:srgbClr val="2D9D78"/>
-          </a:solidFill>
-          <a:ln>
-            <a:noFill/>
-          </a:ln>
-          <a:effectLst/>
-        </p:spPr>
-        <p:style>
-          <a:lnRef idx="1">
-            <a:schemeClr val="accent1"/>
-          </a:lnRef>
-          <a:fillRef idx="3">
-            <a:schemeClr val="accent1"/>
-          </a:fillRef>
-          <a:effectRef idx="2">
-            <a:schemeClr val="accent1"/>
-          </a:effectRef>
-          <a:fontRef idx="minor">
-            <a:schemeClr val="lt1"/>
-          </a:fontRef>
-        </p:style>
-        <p:txBody>
-          <a:bodyPr rtlCol="0" anchor="ctr"/>
-          <a:lstStyle/>
-          <a:p>
-            <a:pPr algn="ctr"/>
-          </a:p>
-        </p:txBody>
-      </p:sp>
-      <p:sp>
-        <p:nvSpPr>
-          <p:cNvPr id="19" name="TextBox 18"/>
-          <p:cNvSpPr txBox="1"/>
-          <p:nvPr/>
-        </p:nvSpPr>
-        <p:spPr>
-          <a:xfrm>
-            <a:off x="8240572" y="4315968"/>
-            <a:ext cx="2936138" cy="1188720"/>
-          </a:xfrm>
-          <a:prstGeom prst="rect">
-            <a:avLst/>
-          </a:prstGeom>
-          <a:noFill/>
-        </p:spPr>
-        <p:txBody>
-          <a:bodyPr wrap="square" lIns="0" rIns="0" tIns="0" bIns="0">
-            <a:spAutoFit/>
-          </a:bodyPr>
-          <a:lstStyle/>
-          <a:p>
-            <a:pPr>
-              <a:spcAft>
-                <a:spcPts val="700"/>
-              </a:spcAft>
-              <a:defRPr sz="1250" b="0">
-                <a:solidFill>
-                  <a:srgbClr val="2D9D78"/>
-                </a:solidFill>
-                <a:latin typeface="Consolas"/>
-              </a:defRPr>
-            </a:pPr>
-            <a:r>
-              <a:t>test_pathfinding.py</a:t>
-            </a:r>
-          </a:p>
-          <a:p>
-            <a:pPr>
-              <a:lnSpc>
-                <a:spcPct val="130000"/>
-              </a:lnSpc>
-              <a:spcAft>
-                <a:spcPts val="0"/>
-              </a:spcAft>
-              <a:defRPr sz="1200" b="0">
-                <a:solidFill>
-                  <a:srgbClr val="C9CEDA"/>
-                </a:solidFill>
-                <a:latin typeface="Segoe UI"/>
-              </a:defRPr>
-            </a:pPr>
-            <a:r>
-              <a:t>226 headless checks, including a fuzz test. All passing.</a:t>
-            </a:r>
-          </a:p>
-        </p:txBody>
-      </p:sp>
-      <p:sp>
-        <p:nvSpPr>
-          <p:cNvPr id="20" name="TextBox 19"/>
-          <p:cNvSpPr txBox="1"/>
-          <p:nvPr/>
-        </p:nvSpPr>
-        <p:spPr>
-          <a:xfrm>
-            <a:off x="777240" y="6172200"/>
-            <a:ext cx="10637215" cy="365760"/>
-          </a:xfrm>
-          <a:prstGeom prst="rect">
-            <a:avLst/>
-          </a:prstGeom>
-          <a:noFill/>
-        </p:spPr>
-        <p:txBody>
-          <a:bodyPr wrap="square" lIns="0" rIns="0" tIns="0" bIns="0">
-            <a:spAutoFit/>
-          </a:bodyPr>
-          <a:lstStyle/>
-          <a:p>
-            <a:pPr>
-              <a:spcAft>
-                <a:spcPts val="0"/>
-              </a:spcAft>
-              <a:defRPr sz="1100" b="0">
-                <a:solidFill>
-                  <a:srgbClr val="6A7179"/>
-                </a:solidFill>
-                <a:latin typeface="Consolas"/>
-              </a:defRPr>
-            </a:pPr>
-            <a:r>
-              <a:t>github.com/Hyperval/maze-runner</a:t>
+              <a:t>No dataset, no network, no hardware  ·  github.com/Hyperval/maze-runner</a:t>
             </a:r>
           </a:p>
         </p:txBody>
